--- a/classes/parte-15-seguridad-de-ia-y-machine-learning/294-robo-y-extraccion-de-modelos/clase-294-presentacion.pptx
+++ b/classes/parte-15-seguridad-de-ia-y-machine-learning/294-robo-y-extraccion-de-modelos/clase-294-presentacion.pptx
@@ -17,6 +17,10 @@
     <p:sldId id="265" r:id="rId16"/>
     <p:sldId id="266" r:id="rId17"/>
     <p:sldId id="267" r:id="rId18"/>
+    <p:sldId id="268" r:id="rId19"/>
+    <p:sldId id="269" r:id="rId20"/>
+    <p:sldId id="270" r:id="rId21"/>
+    <p:sldId id="271" r:id="rId22"/>
   </p:sldIdLst>
   <p:sldSz cx="9144000" cy="6858000" type="screen4x3"/>
   <p:notesSz cx="6858000" cy="9144000"/>
@@ -3198,7 +3202,7 @@
                   <a:srgbClr val="0B3D2E"/>
                 </a:solidFill>
               </a:rPr>
-              <a:t>⚠️ Errores comunes</a:t>
+              <a:t>🧪 Laboratorio guiado</a:t>
             </a:r>
           </a:p>
         </p:txBody>
@@ -3236,67 +3240,97 @@
                   <a:srgbClr val="22282E"/>
                 </a:solidFill>
               </a:rPr>
-              <a:t>•  El sustituto no converge — Pocas consultas o dataset de consulta muy distinto. Aumenta el budget o acerca la distribución.</a:t>
-            </a:r>
-          </a:p>
-          <a:p>
-            <a:pPr>
-              <a:spcAft>
-                <a:spcPts val="600"/>
-              </a:spcAft>
-            </a:pPr>
-            <a:r>
-              <a:rPr sz="1500">
-                <a:solidFill>
-                  <a:srgbClr val="22282E"/>
-                </a:solidFill>
-              </a:rPr>
-              <a:t>•  Membership inference con AUC ≈ 0.5 — El víctima no sobreajusta (bien) o el ataque está mal ajustado. Verifica el split train/test.</a:t>
-            </a:r>
-          </a:p>
-          <a:p>
-            <a:pPr>
-              <a:spcAft>
-                <a:spcPts val="600"/>
-              </a:spcAft>
-            </a:pPr>
-            <a:r>
-              <a:rPr sz="1500">
-                <a:solidFill>
-                  <a:srgbClr val="22282E"/>
-                </a:solidFill>
-              </a:rPr>
-              <a:t>•  La defensa mata la utilidad — Ruido excesivo. Calibra ε o el redondeo hasta equilibrar.</a:t>
-            </a:r>
-          </a:p>
-          <a:p>
-            <a:pPr>
-              <a:spcAft>
-                <a:spcPts val="600"/>
-              </a:spcAft>
-            </a:pPr>
-            <a:r>
-              <a:rPr sz="1500">
-                <a:solidFill>
-                  <a:srgbClr val="22282E"/>
-                </a:solidFill>
-              </a:rPr>
-              <a:t>•  Rate limiting inefectivo — El atacante rota IPs/cuentas. Combina con detección de patrones de consulta anómalos.</a:t>
-            </a:r>
-          </a:p>
-          <a:p>
-            <a:pPr>
-              <a:spcAft>
-                <a:spcPts val="600"/>
-              </a:spcAft>
-            </a:pPr>
-            <a:r>
-              <a:rPr sz="1500">
-                <a:solidFill>
-                  <a:srgbClr val="22282E"/>
-                </a:solidFill>
-              </a:rPr>
-              <a:t>•  Creer que top-1 basta — Aun con solo etiquetas se puede robar; añade otras capas (tasa, monitorización).</a:t>
+              <a:t>•  Sobre un modelo víctima propio.</a:t>
+            </a:r>
+          </a:p>
+          <a:p>
+            <a:pPr>
+              <a:spcAft>
+                <a:spcPts val="600"/>
+              </a:spcAft>
+            </a:pPr>
+            <a:r>
+              <a:rPr sz="1500">
+                <a:solidFill>
+                  <a:srgbClr val="22282E"/>
+                </a:solidFill>
+              </a:rPr>
+              <a:t>•  Prepara la víctima. Entrena un clasificador y envuélvelo como una API local predict() que devuelve probabilidades.</a:t>
+            </a:r>
+          </a:p>
+          <a:p>
+            <a:pPr>
+              <a:spcAft>
+                <a:spcPts val="600"/>
+              </a:spcAft>
+            </a:pPr>
+            <a:r>
+              <a:rPr sz="1500">
+                <a:solidFill>
+                  <a:srgbClr val="22282E"/>
+                </a:solidFill>
+              </a:rPr>
+              <a:t>•  Presupuesto de consultas. Fija un budget (p. ej. 10 000 consultas) para simular un atacante realista.</a:t>
+            </a:r>
+          </a:p>
+          <a:p>
+            <a:pPr>
+              <a:spcAft>
+                <a:spcPts val="600"/>
+              </a:spcAft>
+            </a:pPr>
+            <a:r>
+              <a:rPr sz="1500">
+                <a:solidFill>
+                  <a:srgbClr val="22282E"/>
+                </a:solidFill>
+              </a:rPr>
+              <a:t>•  Extrae con KnockoffNets.</a:t>
+            </a:r>
+          </a:p>
+          <a:p>
+            <a:pPr>
+              <a:spcAft>
+                <a:spcPts val="600"/>
+              </a:spcAft>
+            </a:pPr>
+            <a:r>
+              <a:rPr sz="1500">
+                <a:solidFill>
+                  <a:srgbClr val="22282E"/>
+                </a:solidFill>
+              </a:rPr>
+              <a:t>•  Mide fidelidad y precisión. Compara las predicciones del sustituto con las del víctima (fidelidad) y con la verdad (precisión). Repite reduciendo la salida a solo etiquetas (top-1) y observa la caída.</a:t>
+            </a:r>
+          </a:p>
+          <a:p>
+            <a:pPr>
+              <a:spcAft>
+                <a:spcPts val="600"/>
+              </a:spcAft>
+            </a:pPr>
+            <a:r>
+              <a:rPr sz="1500">
+                <a:solidFill>
+                  <a:srgbClr val="22282E"/>
+                </a:solidFill>
+              </a:rPr>
+              <a:t>•  Usa el sustituto para atacar. Genera adversariales de caja blanca sobre el sustituto y compruébalos contra el víctima (transferibilidad): así el robo habilita evasión.</a:t>
+            </a:r>
+          </a:p>
+          <a:p>
+            <a:pPr>
+              <a:spcAft>
+                <a:spcPts val="600"/>
+              </a:spcAft>
+            </a:pPr>
+            <a:r>
+              <a:rPr sz="1500">
+                <a:solidFill>
+                  <a:srgbClr val="22282E"/>
+                </a:solidFill>
+              </a:rPr>
+              <a:t>•  Membership inference.</a:t>
             </a:r>
           </a:p>
         </p:txBody>
@@ -3347,7 +3381,7 @@
                   <a:srgbClr val="0B3D2E"/>
                 </a:solidFill>
               </a:rPr>
-              <a:t>❓ Preguntas frecuentes</a:t>
+              <a:t>✍️ Ejercicios</a:t>
             </a:r>
           </a:p>
         </p:txBody>
@@ -3385,97 +3419,82 @@
                   <a:srgbClr val="22282E"/>
                 </a:solidFill>
               </a:rPr>
-              <a:t>•  ❓ ¿Puedo robar un modelo solo con etiquetas, sin probabilidades?</a:t>
-            </a:r>
-          </a:p>
-          <a:p>
-            <a:pPr>
-              <a:spcAft>
-                <a:spcPts val="600"/>
-              </a:spcAft>
-            </a:pPr>
-            <a:r>
-              <a:rPr sz="1500">
-                <a:solidFill>
-                  <a:srgbClr val="22282E"/>
-                </a:solidFill>
-              </a:rPr>
-              <a:t>•  Sí, aunque necesitas más consultas. Las probabilidades aceleran mucho el robo porque filtran más información por consulta.</a:t>
-            </a:r>
-          </a:p>
-          <a:p>
-            <a:pPr>
-              <a:spcAft>
-                <a:spcPts val="600"/>
-              </a:spcAft>
-            </a:pPr>
-            <a:r>
-              <a:rPr sz="1500">
-                <a:solidFill>
-                  <a:srgbClr val="22282E"/>
-                </a:solidFill>
-              </a:rPr>
-              <a:t>•  ❓ ¿La extracción es solo un problema de propiedad intelectual?</a:t>
-            </a:r>
-          </a:p>
-          <a:p>
-            <a:pPr>
-              <a:spcAft>
-                <a:spcPts val="600"/>
-              </a:spcAft>
-            </a:pPr>
-            <a:r>
-              <a:rPr sz="1500">
-                <a:solidFill>
-                  <a:srgbClr val="22282E"/>
-                </a:solidFill>
-              </a:rPr>
-              <a:t>•  No. El sustituto habilita ataques de caja negra: generas adversariales sobre tu copia y los transfieres al modelo real.</a:t>
-            </a:r>
-          </a:p>
-          <a:p>
-            <a:pPr>
-              <a:spcAft>
-                <a:spcPts val="600"/>
-              </a:spcAft>
-            </a:pPr>
-            <a:r>
-              <a:rPr sz="1500">
-                <a:solidFill>
-                  <a:srgbClr val="22282E"/>
-                </a:solidFill>
-              </a:rPr>
-              <a:t>•  ❓ ¿La privacidad diferencial resuelve el membership inference?</a:t>
-            </a:r>
-          </a:p>
-          <a:p>
-            <a:pPr>
-              <a:spcAft>
-                <a:spcPts val="600"/>
-              </a:spcAft>
-            </a:pPr>
-            <a:r>
-              <a:rPr sz="1500">
-                <a:solidFill>
-                  <a:srgbClr val="22282E"/>
-                </a:solidFill>
-              </a:rPr>
-              <a:t>•  Lo mitiga acotando la influencia de cada registro, pero con coste de utilidad. Elegir ε es un compromiso privacidad/precisión que debe justificarse.</a:t>
-            </a:r>
-          </a:p>
-          <a:p>
-            <a:pPr>
-              <a:spcAft>
-                <a:spcPts val="600"/>
-              </a:spcAft>
-            </a:pPr>
-            <a:r>
-              <a:rPr sz="1500">
-                <a:solidFill>
-                  <a:srgbClr val="22282E"/>
-                </a:solidFill>
-              </a:rPr>
-              <a:t>•  ❓ ¿Qué es el watermarking de modelos?</a:t>
+              <a:t>•  Traza fidelidad del sustituto frente al número de consultas y encuentra el punto de saturación.</a:t>
+            </a:r>
+          </a:p>
+          <a:p>
+            <a:pPr>
+              <a:spcAft>
+                <a:spcPts val="600"/>
+              </a:spcAft>
+            </a:pPr>
+            <a:r>
+              <a:rPr sz="1500">
+                <a:solidFill>
+                  <a:srgbClr val="22282E"/>
+                </a:solidFill>
+              </a:rPr>
+              <a:t>•  Compara robo con probabilidades completas vs. solo etiquetas.</a:t>
+            </a:r>
+          </a:p>
+          <a:p>
+            <a:pPr>
+              <a:spcAft>
+                <a:spcPts val="600"/>
+              </a:spcAft>
+            </a:pPr>
+            <a:r>
+              <a:rPr sz="1500">
+                <a:solidFill>
+                  <a:srgbClr val="22282E"/>
+                </a:solidFill>
+              </a:rPr>
+              <a:t>•  Mide cómo el overfitting del víctima afecta al AUC de membership inference.</a:t>
+            </a:r>
+          </a:p>
+          <a:p>
+            <a:pPr>
+              <a:spcAft>
+                <a:spcPts val="600"/>
+              </a:spcAft>
+            </a:pPr>
+            <a:r>
+              <a:rPr sz="1500">
+                <a:solidFill>
+                  <a:srgbClr val="22282E"/>
+                </a:solidFill>
+              </a:rPr>
+              <a:t>•  Implementa output perturbation y cuantifica cuánto degrada el robo y cuánto la utilidad legítima.</a:t>
+            </a:r>
+          </a:p>
+          <a:p>
+            <a:pPr>
+              <a:spcAft>
+                <a:spcPts val="600"/>
+              </a:spcAft>
+            </a:pPr>
+            <a:r>
+              <a:rPr sz="1500">
+                <a:solidFill>
+                  <a:srgbClr val="22282E"/>
+                </a:solidFill>
+              </a:rPr>
+              <a:t>•  Diseña una política de rate limiting y estima el coste/tiempo que impone al atacante.</a:t>
+            </a:r>
+          </a:p>
+          <a:p>
+            <a:pPr>
+              <a:spcAft>
+                <a:spcPts val="600"/>
+              </a:spcAft>
+            </a:pPr>
+            <a:r>
+              <a:rPr sz="1500">
+                <a:solidFill>
+                  <a:srgbClr val="22282E"/>
+                </a:solidFill>
+              </a:rPr>
+              <a:t>•  Explica cómo un watermark permitiría probar en un juicio que un modelo fue robado.</a:t>
             </a:r>
           </a:p>
         </p:txBody>
@@ -3526,7 +3545,7 @@
                   <a:srgbClr val="0B3D2E"/>
                 </a:solidFill>
               </a:rPr>
-              <a:t>🔗 Referencias</a:t>
+              <a:t>📝 Reto verificable</a:t>
             </a:r>
           </a:p>
         </p:txBody>
@@ -3564,6 +3583,438 @@
                   <a:srgbClr val="22282E"/>
                 </a:solidFill>
               </a:rPr>
+              <a:t>•  Entrega un estudio de extracción con defensa: script que roba tu modelo alcanzando fidelidad ≥ 90% con probabilidades completas, y demuestra que al aplicar una defensa (top-1 + ruido + rate limiting)…</a:t>
+            </a:r>
+          </a:p>
+          <a:p>
+            <a:pPr>
+              <a:spcAft>
+                <a:spcPts val="600"/>
+              </a:spcAft>
+            </a:pPr>
+            <a:r>
+              <a:rPr sz="1500">
+                <a:solidFill>
+                  <a:srgbClr val="22282E"/>
+                </a:solidFill>
+              </a:rPr>
+              <a:t>•  Criterio de aceptación: el informe presenta una tabla con fidelidad del sustituto antes y después de la defensa, el AUC de membership inference antes y después, y una frase justificando el compromiso…</a:t>
+            </a:r>
+          </a:p>
+        </p:txBody>
+      </p:sp>
+    </p:spTree>
+  </p:cSld>
+  <p:clrMapOvr>
+    <a:masterClrMapping/>
+  </p:clrMapOvr>
+</p:sld>
+</file>
+
+<file path=ppt/slides/slide13.xml><?xml version="1.0" encoding="utf-8"?>
+<p:sld xmlns:a="http://schemas.openxmlformats.org/drawingml/2006/main" xmlns:p="http://schemas.openxmlformats.org/presentationml/2006/main" xmlns:r="http://schemas.openxmlformats.org/officeDocument/2006/relationships">
+  <p:cSld>
+    <p:spTree>
+      <p:nvGrpSpPr>
+        <p:cNvPr id="1" name=""/>
+        <p:cNvGrpSpPr/>
+        <p:nvPr/>
+      </p:nvGrpSpPr>
+      <p:grpSpPr/>
+      <p:sp>
+        <p:nvSpPr>
+          <p:cNvPr id="2" name="TextBox 1"/>
+          <p:cNvSpPr txBox="1"/>
+          <p:nvPr/>
+        </p:nvSpPr>
+        <p:spPr>
+          <a:xfrm>
+            <a:off x="457200" y="320040"/>
+            <a:ext cx="8229600" cy="822960"/>
+          </a:xfrm>
+          <a:prstGeom prst="rect">
+            <a:avLst/>
+          </a:prstGeom>
+          <a:noFill/>
+        </p:spPr>
+        <p:txBody>
+          <a:bodyPr wrap="square">
+            <a:spAutoFit/>
+          </a:bodyPr>
+          <a:lstStyle/>
+          <a:p>
+            <a:r>
+              <a:rPr sz="2600" b="1">
+                <a:solidFill>
+                  <a:srgbClr val="0B3D2E"/>
+                </a:solidFill>
+              </a:rPr>
+              <a:t>⚠️ Errores comunes</a:t>
+            </a:r>
+          </a:p>
+        </p:txBody>
+      </p:sp>
+      <p:sp>
+        <p:nvSpPr>
+          <p:cNvPr id="3" name="TextBox 2"/>
+          <p:cNvSpPr txBox="1"/>
+          <p:nvPr/>
+        </p:nvSpPr>
+        <p:spPr>
+          <a:xfrm>
+            <a:off x="457200" y="1280160"/>
+            <a:ext cx="8229600" cy="4937760"/>
+          </a:xfrm>
+          <a:prstGeom prst="rect">
+            <a:avLst/>
+          </a:prstGeom>
+          <a:noFill/>
+        </p:spPr>
+        <p:txBody>
+          <a:bodyPr wrap="square">
+            <a:spAutoFit/>
+          </a:bodyPr>
+          <a:lstStyle/>
+          <a:p>
+            <a:pPr>
+              <a:spcAft>
+                <a:spcPts val="600"/>
+              </a:spcAft>
+            </a:pPr>
+            <a:r>
+              <a:rPr sz="1500">
+                <a:solidFill>
+                  <a:srgbClr val="22282E"/>
+                </a:solidFill>
+              </a:rPr>
+              <a:t>•  El sustituto no converge — Pocas consultas o dataset de consulta muy distinto. Aumenta el budget o acerca la distribución.</a:t>
+            </a:r>
+          </a:p>
+          <a:p>
+            <a:pPr>
+              <a:spcAft>
+                <a:spcPts val="600"/>
+              </a:spcAft>
+            </a:pPr>
+            <a:r>
+              <a:rPr sz="1500">
+                <a:solidFill>
+                  <a:srgbClr val="22282E"/>
+                </a:solidFill>
+              </a:rPr>
+              <a:t>•  Membership inference con AUC ≈ 0.5 — El víctima no sobreajusta (bien) o el ataque está mal ajustado. Verifica el split train/test.</a:t>
+            </a:r>
+          </a:p>
+          <a:p>
+            <a:pPr>
+              <a:spcAft>
+                <a:spcPts val="600"/>
+              </a:spcAft>
+            </a:pPr>
+            <a:r>
+              <a:rPr sz="1500">
+                <a:solidFill>
+                  <a:srgbClr val="22282E"/>
+                </a:solidFill>
+              </a:rPr>
+              <a:t>•  La defensa mata la utilidad — Ruido excesivo. Calibra ε o el redondeo hasta equilibrar.</a:t>
+            </a:r>
+          </a:p>
+          <a:p>
+            <a:pPr>
+              <a:spcAft>
+                <a:spcPts val="600"/>
+              </a:spcAft>
+            </a:pPr>
+            <a:r>
+              <a:rPr sz="1500">
+                <a:solidFill>
+                  <a:srgbClr val="22282E"/>
+                </a:solidFill>
+              </a:rPr>
+              <a:t>•  Rate limiting inefectivo — El atacante rota IPs/cuentas. Combina con detección de patrones de consulta anómalos.</a:t>
+            </a:r>
+          </a:p>
+          <a:p>
+            <a:pPr>
+              <a:spcAft>
+                <a:spcPts val="600"/>
+              </a:spcAft>
+            </a:pPr>
+            <a:r>
+              <a:rPr sz="1500">
+                <a:solidFill>
+                  <a:srgbClr val="22282E"/>
+                </a:solidFill>
+              </a:rPr>
+              <a:t>•  Creer que top-1 basta — Aun con solo etiquetas se puede robar; añade otras capas (tasa, monitorización).</a:t>
+            </a:r>
+          </a:p>
+        </p:txBody>
+      </p:sp>
+    </p:spTree>
+  </p:cSld>
+  <p:clrMapOvr>
+    <a:masterClrMapping/>
+  </p:clrMapOvr>
+</p:sld>
+</file>
+
+<file path=ppt/slides/slide14.xml><?xml version="1.0" encoding="utf-8"?>
+<p:sld xmlns:a="http://schemas.openxmlformats.org/drawingml/2006/main" xmlns:p="http://schemas.openxmlformats.org/presentationml/2006/main" xmlns:r="http://schemas.openxmlformats.org/officeDocument/2006/relationships">
+  <p:cSld>
+    <p:spTree>
+      <p:nvGrpSpPr>
+        <p:cNvPr id="1" name=""/>
+        <p:cNvGrpSpPr/>
+        <p:nvPr/>
+      </p:nvGrpSpPr>
+      <p:grpSpPr/>
+      <p:sp>
+        <p:nvSpPr>
+          <p:cNvPr id="2" name="TextBox 1"/>
+          <p:cNvSpPr txBox="1"/>
+          <p:nvPr/>
+        </p:nvSpPr>
+        <p:spPr>
+          <a:xfrm>
+            <a:off x="457200" y="320040"/>
+            <a:ext cx="8229600" cy="822960"/>
+          </a:xfrm>
+          <a:prstGeom prst="rect">
+            <a:avLst/>
+          </a:prstGeom>
+          <a:noFill/>
+        </p:spPr>
+        <p:txBody>
+          <a:bodyPr wrap="square">
+            <a:spAutoFit/>
+          </a:bodyPr>
+          <a:lstStyle/>
+          <a:p>
+            <a:r>
+              <a:rPr sz="2600" b="1">
+                <a:solidFill>
+                  <a:srgbClr val="0B3D2E"/>
+                </a:solidFill>
+              </a:rPr>
+              <a:t>❓ Preguntas frecuentes</a:t>
+            </a:r>
+          </a:p>
+        </p:txBody>
+      </p:sp>
+      <p:sp>
+        <p:nvSpPr>
+          <p:cNvPr id="3" name="TextBox 2"/>
+          <p:cNvSpPr txBox="1"/>
+          <p:nvPr/>
+        </p:nvSpPr>
+        <p:spPr>
+          <a:xfrm>
+            <a:off x="457200" y="1280160"/>
+            <a:ext cx="8229600" cy="4937760"/>
+          </a:xfrm>
+          <a:prstGeom prst="rect">
+            <a:avLst/>
+          </a:prstGeom>
+          <a:noFill/>
+        </p:spPr>
+        <p:txBody>
+          <a:bodyPr wrap="square">
+            <a:spAutoFit/>
+          </a:bodyPr>
+          <a:lstStyle/>
+          <a:p>
+            <a:pPr>
+              <a:spcAft>
+                <a:spcPts val="600"/>
+              </a:spcAft>
+            </a:pPr>
+            <a:r>
+              <a:rPr sz="1500">
+                <a:solidFill>
+                  <a:srgbClr val="22282E"/>
+                </a:solidFill>
+              </a:rPr>
+              <a:t>•  ❓ ¿Puedo robar un modelo solo con etiquetas, sin probabilidades?</a:t>
+            </a:r>
+          </a:p>
+          <a:p>
+            <a:pPr>
+              <a:spcAft>
+                <a:spcPts val="600"/>
+              </a:spcAft>
+            </a:pPr>
+            <a:r>
+              <a:rPr sz="1500">
+                <a:solidFill>
+                  <a:srgbClr val="22282E"/>
+                </a:solidFill>
+              </a:rPr>
+              <a:t>•  Sí, aunque necesitas más consultas. Las probabilidades aceleran mucho el robo porque filtran más información por consulta.</a:t>
+            </a:r>
+          </a:p>
+          <a:p>
+            <a:pPr>
+              <a:spcAft>
+                <a:spcPts val="600"/>
+              </a:spcAft>
+            </a:pPr>
+            <a:r>
+              <a:rPr sz="1500">
+                <a:solidFill>
+                  <a:srgbClr val="22282E"/>
+                </a:solidFill>
+              </a:rPr>
+              <a:t>•  ❓ ¿La extracción es solo un problema de propiedad intelectual?</a:t>
+            </a:r>
+          </a:p>
+          <a:p>
+            <a:pPr>
+              <a:spcAft>
+                <a:spcPts val="600"/>
+              </a:spcAft>
+            </a:pPr>
+            <a:r>
+              <a:rPr sz="1500">
+                <a:solidFill>
+                  <a:srgbClr val="22282E"/>
+                </a:solidFill>
+              </a:rPr>
+              <a:t>•  No. El sustituto habilita ataques de caja negra: generas adversariales sobre tu copia y los transfieres al modelo real.</a:t>
+            </a:r>
+          </a:p>
+          <a:p>
+            <a:pPr>
+              <a:spcAft>
+                <a:spcPts val="600"/>
+              </a:spcAft>
+            </a:pPr>
+            <a:r>
+              <a:rPr sz="1500">
+                <a:solidFill>
+                  <a:srgbClr val="22282E"/>
+                </a:solidFill>
+              </a:rPr>
+              <a:t>•  ❓ ¿La privacidad diferencial resuelve el membership inference?</a:t>
+            </a:r>
+          </a:p>
+          <a:p>
+            <a:pPr>
+              <a:spcAft>
+                <a:spcPts val="600"/>
+              </a:spcAft>
+            </a:pPr>
+            <a:r>
+              <a:rPr sz="1500">
+                <a:solidFill>
+                  <a:srgbClr val="22282E"/>
+                </a:solidFill>
+              </a:rPr>
+              <a:t>•  Lo mitiga acotando la influencia de cada registro, pero con coste de utilidad. Elegir ε es un compromiso privacidad/precisión que debe justificarse.</a:t>
+            </a:r>
+          </a:p>
+          <a:p>
+            <a:pPr>
+              <a:spcAft>
+                <a:spcPts val="600"/>
+              </a:spcAft>
+            </a:pPr>
+            <a:r>
+              <a:rPr sz="1500">
+                <a:solidFill>
+                  <a:srgbClr val="22282E"/>
+                </a:solidFill>
+              </a:rPr>
+              <a:t>•  ❓ ¿Qué es el watermarking de modelos?</a:t>
+            </a:r>
+          </a:p>
+        </p:txBody>
+      </p:sp>
+    </p:spTree>
+  </p:cSld>
+  <p:clrMapOvr>
+    <a:masterClrMapping/>
+  </p:clrMapOvr>
+</p:sld>
+</file>
+
+<file path=ppt/slides/slide15.xml><?xml version="1.0" encoding="utf-8"?>
+<p:sld xmlns:a="http://schemas.openxmlformats.org/drawingml/2006/main" xmlns:p="http://schemas.openxmlformats.org/presentationml/2006/main" xmlns:r="http://schemas.openxmlformats.org/officeDocument/2006/relationships">
+  <p:cSld>
+    <p:spTree>
+      <p:nvGrpSpPr>
+        <p:cNvPr id="1" name=""/>
+        <p:cNvGrpSpPr/>
+        <p:nvPr/>
+      </p:nvGrpSpPr>
+      <p:grpSpPr/>
+      <p:sp>
+        <p:nvSpPr>
+          <p:cNvPr id="2" name="TextBox 1"/>
+          <p:cNvSpPr txBox="1"/>
+          <p:nvPr/>
+        </p:nvSpPr>
+        <p:spPr>
+          <a:xfrm>
+            <a:off x="457200" y="320040"/>
+            <a:ext cx="8229600" cy="822960"/>
+          </a:xfrm>
+          <a:prstGeom prst="rect">
+            <a:avLst/>
+          </a:prstGeom>
+          <a:noFill/>
+        </p:spPr>
+        <p:txBody>
+          <a:bodyPr wrap="square">
+            <a:spAutoFit/>
+          </a:bodyPr>
+          <a:lstStyle/>
+          <a:p>
+            <a:r>
+              <a:rPr sz="2600" b="1">
+                <a:solidFill>
+                  <a:srgbClr val="0B3D2E"/>
+                </a:solidFill>
+              </a:rPr>
+              <a:t>🔗 Referencias</a:t>
+            </a:r>
+          </a:p>
+        </p:txBody>
+      </p:sp>
+      <p:sp>
+        <p:nvSpPr>
+          <p:cNvPr id="3" name="TextBox 2"/>
+          <p:cNvSpPr txBox="1"/>
+          <p:nvPr/>
+        </p:nvSpPr>
+        <p:spPr>
+          <a:xfrm>
+            <a:off x="457200" y="1280160"/>
+            <a:ext cx="8229600" cy="4937760"/>
+          </a:xfrm>
+          <a:prstGeom prst="rect">
+            <a:avLst/>
+          </a:prstGeom>
+          <a:noFill/>
+        </p:spPr>
+        <p:txBody>
+          <a:bodyPr wrap="square">
+            <a:spAutoFit/>
+          </a:bodyPr>
+          <a:lstStyle/>
+          <a:p>
+            <a:pPr>
+              <a:spcAft>
+                <a:spcPts val="600"/>
+              </a:spcAft>
+            </a:pPr>
+            <a:r>
+              <a:rPr sz="1500">
+                <a:solidFill>
+                  <a:srgbClr val="22282E"/>
+                </a:solidFill>
+              </a:rPr>
               <a:t>•  Tramèr et al., "Stealing Machine Learning Models via Prediction APIs", USENIX 2016 — &lt;https://arxiv.org/abs/1609.02943&gt;</a:t>
             </a:r>
           </a:p>
@@ -3629,6 +4080,81 @@
           </a:p>
         </p:txBody>
       </p:sp>
+    </p:spTree>
+  </p:cSld>
+  <p:clrMapOvr>
+    <a:masterClrMapping/>
+  </p:clrMapOvr>
+</p:sld>
+</file>
+
+<file path=ppt/slides/slide16.xml><?xml version="1.0" encoding="utf-8"?>
+<p:sld xmlns:a="http://schemas.openxmlformats.org/drawingml/2006/main" xmlns:p="http://schemas.openxmlformats.org/presentationml/2006/main" xmlns:r="http://schemas.openxmlformats.org/officeDocument/2006/relationships">
+  <p:cSld>
+    <p:spTree>
+      <p:nvGrpSpPr>
+        <p:cNvPr id="1" name=""/>
+        <p:cNvGrpSpPr/>
+        <p:nvPr/>
+      </p:nvGrpSpPr>
+      <p:grpSpPr/>
+      <p:sp>
+        <p:nvSpPr>
+          <p:cNvPr id="2" name="TextBox 1"/>
+          <p:cNvSpPr txBox="1"/>
+          <p:nvPr/>
+        </p:nvSpPr>
+        <p:spPr>
+          <a:xfrm>
+            <a:off x="457200" y="274320"/>
+            <a:ext cx="8229600" cy="640080"/>
+          </a:xfrm>
+          <a:prstGeom prst="rect">
+            <a:avLst/>
+          </a:prstGeom>
+          <a:noFill/>
+        </p:spPr>
+        <p:txBody>
+          <a:bodyPr wrap="square">
+            <a:spAutoFit/>
+          </a:bodyPr>
+          <a:lstStyle/>
+          <a:p>
+            <a:r>
+              <a:rPr sz="2200" b="1">
+                <a:solidFill>
+                  <a:srgbClr val="0B3D2E"/>
+                </a:solidFill>
+              </a:rPr>
+              <a:t>Diagrama de la clase</a:t>
+            </a:r>
+          </a:p>
+        </p:txBody>
+      </p:sp>
+      <p:pic>
+        <p:nvPicPr>
+          <p:cNvPr id="3" name="Picture 2" descr="ed0169877c4d40a1.png"/>
+          <p:cNvPicPr>
+            <a:picLocks noChangeAspect="1"/>
+          </p:cNvPicPr>
+          <p:nvPr/>
+        </p:nvPicPr>
+        <p:blipFill>
+          <a:blip r:embed="rId2"/>
+          <a:stretch>
+            <a:fillRect/>
+          </a:stretch>
+        </p:blipFill>
+        <p:spPr>
+          <a:xfrm>
+            <a:off x="457200" y="3271368"/>
+            <a:ext cx="8229600" cy="955343"/>
+          </a:xfrm>
+          <a:prstGeom prst="rect">
+            <a:avLst/>
+          </a:prstGeom>
+        </p:spPr>
+      </p:pic>
     </p:spTree>
   </p:cSld>
   <p:clrMapOvr>
@@ -3713,7 +4239,7 @@
                   <a:srgbClr val="22282E"/>
                 </a:solidFill>
               </a:rPr>
-              <a:t>•  Aprender cómo un adversario con solo acceso a la API de predicción puede robar la funcionalidad de un modelo (model extraction), reconstruir datos de entrenamiento (model inversion) o determinar si un registro estuvo en el entrenamiento (membership inference). El alumno ejecutará una extracción sobre un modelo propio y aplicará defensas como rate limiting, ruido en la salida y marcas de agua.</a:t>
+              <a:t>•  Aprender cómo un adversario con solo acceso a la API de predicción puede robar la funcionalidad de un modelo (model extraction), reconstruir datos de entrenamiento (model inversion) o determinar si…</a:t>
             </a:r>
           </a:p>
         </p:txBody>
@@ -4107,7 +4633,7 @@
                   <a:srgbClr val="0B3D2E"/>
                 </a:solidFill>
               </a:rPr>
-              <a:t>📖 Definiciones y características</a:t>
+              <a:t>🧠 Explicación en profundidad</a:t>
             </a:r>
           </a:p>
         </p:txBody>
@@ -4145,97 +4671,37 @@
                   <a:srgbClr val="22282E"/>
                 </a:solidFill>
               </a:rPr>
-              <a:t>•  Model extraction: entrenar un modelo sustituto que replica al víctima usando pares (consulta, respuesta). Característica: efectivo incluso con solo etiquetas, mejor con probabilidades.</a:t>
-            </a:r>
-          </a:p>
-          <a:p>
-            <a:pPr>
-              <a:spcAft>
-                <a:spcPts val="600"/>
-              </a:spcAft>
-            </a:pPr>
-            <a:r>
-              <a:rPr sz="1500">
-                <a:solidFill>
-                  <a:srgbClr val="22282E"/>
-                </a:solidFill>
-              </a:rPr>
-              <a:t>•  Fidelidad vs. precisión del sustituto: fidelidad = coincidir con el víctima (aun en sus errores); precisión = acertar la verdad. Un buen robo maximiza fidelidad.</a:t>
-            </a:r>
-          </a:p>
-          <a:p>
-            <a:pPr>
-              <a:spcAft>
-                <a:spcPts val="600"/>
-              </a:spcAft>
-            </a:pPr>
-            <a:r>
-              <a:rPr sz="1500">
-                <a:solidFill>
-                  <a:srgbClr val="22282E"/>
-                </a:solidFill>
-              </a:rPr>
-              <a:t>•  Model inversion: reconstruir entradas representativas de una clase a partir de las salidas del modelo. Característica: riesgo de privacidad en modelos de rostros o salud.</a:t>
-            </a:r>
-          </a:p>
-          <a:p>
-            <a:pPr>
-              <a:spcAft>
-                <a:spcPts val="600"/>
-              </a:spcAft>
-            </a:pPr>
-            <a:r>
-              <a:rPr sz="1500">
-                <a:solidFill>
-                  <a:srgbClr val="22282E"/>
-                </a:solidFill>
-              </a:rPr>
-              <a:t>•  Membership inference: decidir si un registro concreto formó parte del entrenamiento. Característica: explota el overfitting; se mide con AUC.</a:t>
-            </a:r>
-          </a:p>
-          <a:p>
-            <a:pPr>
-              <a:spcAft>
-                <a:spcPts val="600"/>
-              </a:spcAft>
-            </a:pPr>
-            <a:r>
-              <a:rPr sz="1500">
-                <a:solidFill>
-                  <a:srgbClr val="22282E"/>
-                </a:solidFill>
-              </a:rPr>
-              <a:t>•  Rate limiting: limitar consultas por cliente/tiempo; encarece la extracción.</a:t>
-            </a:r>
-          </a:p>
-          <a:p>
-            <a:pPr>
-              <a:spcAft>
-                <a:spcPts val="600"/>
-              </a:spcAft>
-            </a:pPr>
-            <a:r>
-              <a:rPr sz="1500">
-                <a:solidFill>
-                  <a:srgbClr val="22282E"/>
-                </a:solidFill>
-              </a:rPr>
-              <a:t>•  Output perturbation: devolver top-k, redondear o añadir ruido a las probabilidades para reducir la señal robable.</a:t>
-            </a:r>
-          </a:p>
-          <a:p>
-            <a:pPr>
-              <a:spcAft>
-                <a:spcPts val="600"/>
-              </a:spcAft>
-            </a:pPr>
-            <a:r>
-              <a:rPr sz="1500">
-                <a:solidFill>
-                  <a:srgbClr val="22282E"/>
-                </a:solidFill>
-              </a:rPr>
-              <a:t>•  Privacidad diferencial: entrenar con ruido calibrado (ε) para acotar cuánto influye un registro individual; mitiga membership inference.</a:t>
+              <a:t>•  La extracción aproxima comportamiento mediante consultas; no siempre recupera parámetros. El riesgo depende de interfaz, salidas, coste, valor intelectual y posibilidad de usar el sustituto. Rate…</a:t>
+            </a:r>
+          </a:p>
+          <a:p>
+            <a:pPr>
+              <a:spcAft>
+                <a:spcPts val="600"/>
+              </a:spcAft>
+            </a:pPr>
+            <a:r>
+              <a:rPr sz="1500">
+                <a:solidFill>
+                  <a:srgbClr val="22282E"/>
+                </a:solidFill>
+              </a:rPr>
+              <a:t>•  El diagrama debe leerse como una cadena de supuestos: verificar un nodo no demuestra los siguientes. La evaluación declara actor, acceso, datos, métrica, umbral y consecuencia; compara una línea base…</a:t>
+            </a:r>
+          </a:p>
+          <a:p>
+            <a:pPr>
+              <a:spcAft>
+                <a:spcPts val="600"/>
+              </a:spcAft>
+            </a:pPr>
+            <a:r>
+              <a:rPr sz="1500">
+                <a:solidFill>
+                  <a:srgbClr val="22282E"/>
+                </a:solidFill>
+              </a:rPr>
+              <a:t>•  Muchas consultas legítimas por lote se parecen a extracción. La detección combina patrón, identidad y propósito para no bloquear negocio.</a:t>
             </a:r>
           </a:p>
         </p:txBody>
@@ -4286,7 +4752,7 @@
                   <a:srgbClr val="0B3D2E"/>
                 </a:solidFill>
               </a:rPr>
-              <a:t>🧰 Herramientas y preparación</a:t>
+              <a:t>📔 Glosario operativo</a:t>
             </a:r>
           </a:p>
         </p:txBody>
@@ -4324,52 +4790,52 @@
                   <a:srgbClr val="22282E"/>
                 </a:solidFill>
               </a:rPr>
-              <a:t>•  pip install adversarial-robustness-toolbox torch torchvision scikit-learn numpy</a:t>
-            </a:r>
-          </a:p>
-          <a:p>
-            <a:pPr>
-              <a:spcAft>
-                <a:spcPts val="600"/>
-              </a:spcAft>
-            </a:pPr>
-            <a:r>
-              <a:rPr sz="1500">
-                <a:solidFill>
-                  <a:srgbClr val="22282E"/>
-                </a:solidFill>
-              </a:rPr>
-              <a:t>•  ART implementa CopycatCNN/KnockoffNets (extracción) y ataques de inferencia de membresía.</a:t>
-            </a:r>
-          </a:p>
-          <a:p>
-            <a:pPr>
-              <a:spcAft>
-                <a:spcPts val="600"/>
-              </a:spcAft>
-            </a:pPr>
-            <a:r>
-              <a:rPr sz="1500">
-                <a:solidFill>
-                  <a:srgbClr val="22282E"/>
-                </a:solidFill>
-              </a:rPr>
-              <a:t>•  Un modelo víctima propio, expuesto localmente como función predict(x).</a:t>
-            </a:r>
-          </a:p>
-          <a:p>
-            <a:pPr>
-              <a:spcAft>
-                <a:spcPts val="600"/>
-              </a:spcAft>
-            </a:pPr>
-            <a:r>
-              <a:rPr sz="1500">
-                <a:solidFill>
-                  <a:srgbClr val="22282E"/>
-                </a:solidFill>
-              </a:rPr>
-              <a:t>•  Un dataset "de consulta" (puede ser distinto al de entrenamiento del víctima).</a:t>
+              <a:t>•  Término — Definición</a:t>
+            </a:r>
+          </a:p>
+          <a:p>
+            <a:pPr>
+              <a:spcAft>
+                <a:spcPts val="600"/>
+              </a:spcAft>
+            </a:pPr>
+            <a:r>
+              <a:rPr sz="1500">
+                <a:solidFill>
+                  <a:srgbClr val="22282E"/>
+                </a:solidFill>
+              </a:rPr>
+              <a:t>•  Model extraction — Construcción de un sustituto desde observaciones.</a:t>
+            </a:r>
+          </a:p>
+          <a:p>
+            <a:pPr>
+              <a:spcAft>
+                <a:spcPts val="600"/>
+              </a:spcAft>
+            </a:pPr>
+            <a:r>
+              <a:rPr sz="1500">
+                <a:solidFill>
+                  <a:srgbClr val="22282E"/>
+                </a:solidFill>
+              </a:rPr>
+              <a:t>•  Evaluación — Experimento reproducible ligado a un riesgo y criterio.</a:t>
+            </a:r>
+          </a:p>
+          <a:p>
+            <a:pPr>
+              <a:spcAft>
+                <a:spcPts val="600"/>
+              </a:spcAft>
+            </a:pPr>
+            <a:r>
+              <a:rPr sz="1500">
+                <a:solidFill>
+                  <a:srgbClr val="22282E"/>
+                </a:solidFill>
+              </a:rPr>
+              <a:t>•  Riesgo residual — Exposición que permanece tras controles.</a:t>
             </a:r>
           </a:p>
         </p:txBody>
@@ -4420,7 +4886,7 @@
                   <a:srgbClr val="0B3D2E"/>
                 </a:solidFill>
               </a:rPr>
-              <a:t>🧪 Laboratorio guiado</a:t>
+              <a:t>✅ Criterio de dominio</a:t>
             </a:r>
           </a:p>
         </p:txBody>
@@ -4458,97 +4924,7 @@
                   <a:srgbClr val="22282E"/>
                 </a:solidFill>
               </a:rPr>
-              <a:t>•  Sobre un modelo víctima propio.</a:t>
-            </a:r>
-          </a:p>
-          <a:p>
-            <a:pPr>
-              <a:spcAft>
-                <a:spcPts val="600"/>
-              </a:spcAft>
-            </a:pPr>
-            <a:r>
-              <a:rPr sz="1500">
-                <a:solidFill>
-                  <a:srgbClr val="22282E"/>
-                </a:solidFill>
-              </a:rPr>
-              <a:t>•  Prepara la víctima. Entrena un clasificador y envuélvelo como una API local predict() que devuelve probabilidades.</a:t>
-            </a:r>
-          </a:p>
-          <a:p>
-            <a:pPr>
-              <a:spcAft>
-                <a:spcPts val="600"/>
-              </a:spcAft>
-            </a:pPr>
-            <a:r>
-              <a:rPr sz="1500">
-                <a:solidFill>
-                  <a:srgbClr val="22282E"/>
-                </a:solidFill>
-              </a:rPr>
-              <a:t>•  Presupuesto de consultas. Fija un budget (p. ej. 10 000 consultas) para simular un atacante realista.</a:t>
-            </a:r>
-          </a:p>
-          <a:p>
-            <a:pPr>
-              <a:spcAft>
-                <a:spcPts val="600"/>
-              </a:spcAft>
-            </a:pPr>
-            <a:r>
-              <a:rPr sz="1500">
-                <a:solidFill>
-                  <a:srgbClr val="22282E"/>
-                </a:solidFill>
-              </a:rPr>
-              <a:t>•  Extrae con KnockoffNets.</a:t>
-            </a:r>
-          </a:p>
-          <a:p>
-            <a:pPr>
-              <a:spcAft>
-                <a:spcPts val="600"/>
-              </a:spcAft>
-            </a:pPr>
-            <a:r>
-              <a:rPr sz="1500">
-                <a:solidFill>
-                  <a:srgbClr val="22282E"/>
-                </a:solidFill>
-              </a:rPr>
-              <a:t>•  from art.attacks.extraction import KnockoffNets</a:t>
-            </a:r>
-          </a:p>
-          <a:p>
-            <a:pPr>
-              <a:spcAft>
-                <a:spcPts val="600"/>
-              </a:spcAft>
-            </a:pPr>
-            <a:r>
-              <a:rPr sz="1500">
-                <a:solidFill>
-                  <a:srgbClr val="22282E"/>
-                </a:solidFill>
-              </a:rPr>
-              <a:t>•  attack = KnockoffNets(classifier=victim, batchsizequery=64,</a:t>
-            </a:r>
-          </a:p>
-          <a:p>
-            <a:pPr>
-              <a:spcAft>
-                <a:spcPts val="600"/>
-              </a:spcAft>
-            </a:pPr>
-            <a:r>
-              <a:rPr sz="1500">
-                <a:solidFill>
-                  <a:srgbClr val="22282E"/>
-                </a:solidFill>
-              </a:rPr>
-              <a:t>•  nbepochs=10, nbstolen=10000)</a:t>
+              <a:t>•  El alumno demuestra dominio cuando formula un escenario específico, reproduce evidencia, explica límites y diseña controles técnicos y de gobierno sin atribuir certeza al modelo.</a:t>
             </a:r>
           </a:p>
         </p:txBody>
@@ -4599,7 +4975,7 @@
                   <a:srgbClr val="0B3D2E"/>
                 </a:solidFill>
               </a:rPr>
-              <a:t>✍️ Ejercicios</a:t>
+              <a:t>📖 Definiciones y características</a:t>
             </a:r>
           </a:p>
         </p:txBody>
@@ -4637,82 +5013,97 @@
                   <a:srgbClr val="22282E"/>
                 </a:solidFill>
               </a:rPr>
-              <a:t>•  Traza fidelidad del sustituto frente al número de consultas y encuentra el punto de saturación.</a:t>
-            </a:r>
-          </a:p>
-          <a:p>
-            <a:pPr>
-              <a:spcAft>
-                <a:spcPts val="600"/>
-              </a:spcAft>
-            </a:pPr>
-            <a:r>
-              <a:rPr sz="1500">
-                <a:solidFill>
-                  <a:srgbClr val="22282E"/>
-                </a:solidFill>
-              </a:rPr>
-              <a:t>•  Compara robo con probabilidades completas vs. solo etiquetas.</a:t>
-            </a:r>
-          </a:p>
-          <a:p>
-            <a:pPr>
-              <a:spcAft>
-                <a:spcPts val="600"/>
-              </a:spcAft>
-            </a:pPr>
-            <a:r>
-              <a:rPr sz="1500">
-                <a:solidFill>
-                  <a:srgbClr val="22282E"/>
-                </a:solidFill>
-              </a:rPr>
-              <a:t>•  Mide cómo el overfitting del víctima afecta al AUC de membership inference.</a:t>
-            </a:r>
-          </a:p>
-          <a:p>
-            <a:pPr>
-              <a:spcAft>
-                <a:spcPts val="600"/>
-              </a:spcAft>
-            </a:pPr>
-            <a:r>
-              <a:rPr sz="1500">
-                <a:solidFill>
-                  <a:srgbClr val="22282E"/>
-                </a:solidFill>
-              </a:rPr>
-              <a:t>•  Implementa output perturbation y cuantifica cuánto degrada el robo y cuánto la utilidad legítima.</a:t>
-            </a:r>
-          </a:p>
-          <a:p>
-            <a:pPr>
-              <a:spcAft>
-                <a:spcPts val="600"/>
-              </a:spcAft>
-            </a:pPr>
-            <a:r>
-              <a:rPr sz="1500">
-                <a:solidFill>
-                  <a:srgbClr val="22282E"/>
-                </a:solidFill>
-              </a:rPr>
-              <a:t>•  Diseña una política de rate limiting y estima el coste/tiempo que impone al atacante.</a:t>
-            </a:r>
-          </a:p>
-          <a:p>
-            <a:pPr>
-              <a:spcAft>
-                <a:spcPts val="600"/>
-              </a:spcAft>
-            </a:pPr>
-            <a:r>
-              <a:rPr sz="1500">
-                <a:solidFill>
-                  <a:srgbClr val="22282E"/>
-                </a:solidFill>
-              </a:rPr>
-              <a:t>•  Explica cómo un watermark permitiría probar en un juicio que un modelo fue robado.</a:t>
+              <a:t>•  Model extraction: entrenar un modelo sustituto que replica al víctima usando pares (consulta, respuesta). Característica: efectivo incluso con solo etiquetas, mejor con probabilidades.</a:t>
+            </a:r>
+          </a:p>
+          <a:p>
+            <a:pPr>
+              <a:spcAft>
+                <a:spcPts val="600"/>
+              </a:spcAft>
+            </a:pPr>
+            <a:r>
+              <a:rPr sz="1500">
+                <a:solidFill>
+                  <a:srgbClr val="22282E"/>
+                </a:solidFill>
+              </a:rPr>
+              <a:t>•  Fidelidad vs. precisión del sustituto: fidelidad = coincidir con el víctima (aun en sus errores); precisión = acertar la verdad. Un buen robo maximiza fidelidad.</a:t>
+            </a:r>
+          </a:p>
+          <a:p>
+            <a:pPr>
+              <a:spcAft>
+                <a:spcPts val="600"/>
+              </a:spcAft>
+            </a:pPr>
+            <a:r>
+              <a:rPr sz="1500">
+                <a:solidFill>
+                  <a:srgbClr val="22282E"/>
+                </a:solidFill>
+              </a:rPr>
+              <a:t>•  Model inversion: reconstruir entradas representativas de una clase a partir de las salidas del modelo. Característica: riesgo de privacidad en modelos de rostros o salud.</a:t>
+            </a:r>
+          </a:p>
+          <a:p>
+            <a:pPr>
+              <a:spcAft>
+                <a:spcPts val="600"/>
+              </a:spcAft>
+            </a:pPr>
+            <a:r>
+              <a:rPr sz="1500">
+                <a:solidFill>
+                  <a:srgbClr val="22282E"/>
+                </a:solidFill>
+              </a:rPr>
+              <a:t>•  Membership inference: decidir si un registro concreto formó parte del entrenamiento. Característica: explota el overfitting; se mide con AUC.</a:t>
+            </a:r>
+          </a:p>
+          <a:p>
+            <a:pPr>
+              <a:spcAft>
+                <a:spcPts val="600"/>
+              </a:spcAft>
+            </a:pPr>
+            <a:r>
+              <a:rPr sz="1500">
+                <a:solidFill>
+                  <a:srgbClr val="22282E"/>
+                </a:solidFill>
+              </a:rPr>
+              <a:t>•  Rate limiting: limitar consultas por cliente/tiempo; encarece la extracción.</a:t>
+            </a:r>
+          </a:p>
+          <a:p>
+            <a:pPr>
+              <a:spcAft>
+                <a:spcPts val="600"/>
+              </a:spcAft>
+            </a:pPr>
+            <a:r>
+              <a:rPr sz="1500">
+                <a:solidFill>
+                  <a:srgbClr val="22282E"/>
+                </a:solidFill>
+              </a:rPr>
+              <a:t>•  Output perturbation: devolver top-k, redondear o añadir ruido a las probabilidades para reducir la señal robable.</a:t>
+            </a:r>
+          </a:p>
+          <a:p>
+            <a:pPr>
+              <a:spcAft>
+                <a:spcPts val="600"/>
+              </a:spcAft>
+            </a:pPr>
+            <a:r>
+              <a:rPr sz="1500">
+                <a:solidFill>
+                  <a:srgbClr val="22282E"/>
+                </a:solidFill>
+              </a:rPr>
+              <a:t>•  Privacidad diferencial: entrenar con ruido calibrado (ε) para acotar cuánto influye un registro individual; mitiga membership inference.</a:t>
             </a:r>
           </a:p>
         </p:txBody>
@@ -4763,7 +5154,7 @@
                   <a:srgbClr val="0B3D2E"/>
                 </a:solidFill>
               </a:rPr>
-              <a:t>📝 Reto verificable</a:t>
+              <a:t>🧰 Herramientas y preparación</a:t>
             </a:r>
           </a:p>
         </p:txBody>
@@ -4801,22 +5192,37 @@
                   <a:srgbClr val="22282E"/>
                 </a:solidFill>
               </a:rPr>
-              <a:t>•  Entrega un estudio de extracción con defensa: script que roba tu modelo alcanzando fidelidad ≥ 90% con probabilidades completas, y demuestra que al aplicar una defensa (top-1 + ruido + rate limiting) la fidelidad cae de forma significativa manteniendo la utilidad legítima aceptable.</a:t>
-            </a:r>
-          </a:p>
-          <a:p>
-            <a:pPr>
-              <a:spcAft>
-                <a:spcPts val="600"/>
-              </a:spcAft>
-            </a:pPr>
-            <a:r>
-              <a:rPr sz="1500">
-                <a:solidFill>
-                  <a:srgbClr val="22282E"/>
-                </a:solidFill>
-              </a:rPr>
-              <a:t>•  Criterio de aceptación: el informe presenta una tabla con fidelidad del sustituto antes y después de la defensa, el AUC de membership inference antes y después, y una frase justificando el compromiso utilidad/seguridad elegido. Todo reproducible.</a:t>
+              <a:t>•  ART implementa CopycatCNN/KnockoffNets (extracción) y ataques de inferencia de membresía.</a:t>
+            </a:r>
+          </a:p>
+          <a:p>
+            <a:pPr>
+              <a:spcAft>
+                <a:spcPts val="600"/>
+              </a:spcAft>
+            </a:pPr>
+            <a:r>
+              <a:rPr sz="1500">
+                <a:solidFill>
+                  <a:srgbClr val="22282E"/>
+                </a:solidFill>
+              </a:rPr>
+              <a:t>•  Un modelo víctima propio, expuesto localmente como función predict(x).</a:t>
+            </a:r>
+          </a:p>
+          <a:p>
+            <a:pPr>
+              <a:spcAft>
+                <a:spcPts val="600"/>
+              </a:spcAft>
+            </a:pPr>
+            <a:r>
+              <a:rPr sz="1500">
+                <a:solidFill>
+                  <a:srgbClr val="22282E"/>
+                </a:solidFill>
+              </a:rPr>
+              <a:t>•  Un dataset "de consulta" (puede ser distinto al de entrenamiento del víctima).</a:t>
             </a:r>
           </a:p>
         </p:txBody>
